--- a/3-Master_Plan/re_entry/HEROs_and_PASSes/slides/auto/CHAR_PD17_HAND.pptx
+++ b/3-Master_Plan/re_entry/HEROs_and_PASSes/slides/auto/CHAR_PD17_HAND.pptx
@@ -5,7 +5,7 @@
     <p:sldMasterId id="2147483648" r:id="rId1"/>
   </p:sldMasterIdLst>
   <p:notesMasterIdLst>
-    <p:notesMasterId r:id="rId15"/>
+    <p:notesMasterId r:id="rId18"/>
   </p:notesMasterIdLst>
   <p:sldIdLst>
     <p:sldId id="265" r:id="rId2"/>
@@ -18,9 +18,12 @@
     <p:sldId id="286" r:id="rId9"/>
     <p:sldId id="289" r:id="rId10"/>
     <p:sldId id="290" r:id="rId11"/>
-    <p:sldId id="257" r:id="rId12"/>
-    <p:sldId id="275" r:id="rId13"/>
-    <p:sldId id="278" r:id="rId14"/>
+    <p:sldId id="293" r:id="rId12"/>
+    <p:sldId id="292" r:id="rId13"/>
+    <p:sldId id="294" r:id="rId14"/>
+    <p:sldId id="257" r:id="rId15"/>
+    <p:sldId id="275" r:id="rId16"/>
+    <p:sldId id="278" r:id="rId17"/>
   </p:sldIdLst>
   <p:sldSz cx="12192000" cy="6858000"/>
   <p:notesSz cx="6858000" cy="9144000"/>
@@ -559,7 +562,7 @@
           <a:p>
             <a:fld id="{0AA65AC5-4B69-CD42-A9CA-DA3CB3FA4FFA}" type="slidenum">
               <a:rPr lang="en-US" smtClean="0"/>
-              <a:t>12</a:t>
+              <a:t>15</a:t>
             </a:fld>
             <a:endParaRPr lang="en-US"/>
           </a:p>
@@ -7995,6 +7998,856 @@
           <a:chExt cx="0" cy="0"/>
         </a:xfrm>
       </p:grpSpPr>
+      <p:sp>
+        <p:nvSpPr>
+          <p:cNvPr id="2" name="TextBox 1"/>
+          <p:cNvSpPr txBox="1"/>
+          <p:nvPr/>
+        </p:nvSpPr>
+        <p:spPr>
+          <a:xfrm>
+            <a:off x="384048" y="219456"/>
+            <a:ext cx="11423599" cy="457200"/>
+          </a:xfrm>
+          <a:prstGeom prst="rect">
+            <a:avLst/>
+          </a:prstGeom>
+          <a:noFill/>
+        </p:spPr>
+        <p:txBody>
+          <a:bodyPr wrap="none">
+            <a:spAutoFit/>
+          </a:bodyPr>
+          <a:lstStyle/>
+          <a:p>
+            <a:r>
+              <a:rPr sz="2000" b="1" i="0" baseline="0">
+                <a:latin typeface="Calibri"/>
+              </a:rPr>
+              <a:t>NCAA roster sizes after the minutes filter</a:t>
+            </a:r>
+          </a:p>
+        </p:txBody>
+      </p:sp>
+      <p:sp>
+        <p:nvSpPr>
+          <p:cNvPr id="3" name="TextBox 2"/>
+          <p:cNvSpPr txBox="1"/>
+          <p:nvPr/>
+        </p:nvSpPr>
+        <p:spPr>
+          <a:xfrm>
+            <a:off x="384048" y="713232"/>
+            <a:ext cx="11423599" cy="246888"/>
+          </a:xfrm>
+          <a:prstGeom prst="rect">
+            <a:avLst/>
+          </a:prstGeom>
+          <a:noFill/>
+        </p:spPr>
+        <p:txBody>
+          <a:bodyPr wrap="none">
+            <a:spAutoFit/>
+          </a:bodyPr>
+          <a:lstStyle/>
+          <a:p>
+            <a:r>
+              <a:rPr sz="1000" b="0" i="0" baseline="0">
+                <a:latin typeface="Calibri"/>
+              </a:rPr>
+              <a:t>MBB 2011-2021 · min 20 min · mean=9.6 vs LG $C=15$</a:t>
+            </a:r>
+          </a:p>
+        </p:txBody>
+      </p:sp>
+      <p:pic>
+        <p:nvPicPr>
+          <p:cNvPr id="4" name="Picture 3" descr="GRANDCHILD_ncaa_roster_size_distribution_2011_2021.png"/>
+          <p:cNvPicPr>
+            <a:picLocks noChangeAspect="1"/>
+          </p:cNvPicPr>
+          <p:nvPr/>
+        </p:nvPicPr>
+        <p:blipFill>
+          <a:blip r:embed="rId2"/>
+          <a:stretch>
+            <a:fillRect/>
+          </a:stretch>
+        </p:blipFill>
+        <p:spPr>
+          <a:xfrm>
+            <a:off x="908273" y="916050"/>
+            <a:ext cx="10375454" cy="4063452"/>
+          </a:xfrm>
+          <a:prstGeom prst="rect">
+            <a:avLst/>
+          </a:prstGeom>
+        </p:spPr>
+      </p:pic>
+      <p:sp>
+        <p:nvSpPr>
+          <p:cNvPr id="5" name="TextBox 4"/>
+          <p:cNvSpPr txBox="1"/>
+          <p:nvPr/>
+        </p:nvSpPr>
+        <p:spPr>
+          <a:xfrm>
+            <a:off x="1089127" y="5405189"/>
+            <a:ext cx="11095528" cy="565952"/>
+          </a:xfrm>
+          <a:prstGeom prst="rect">
+            <a:avLst/>
+          </a:prstGeom>
+          <a:noFill/>
+        </p:spPr>
+        <p:txBody>
+          <a:bodyPr wrap="square" numCol="2">
+            <a:noAutofit/>
+          </a:bodyPr>
+          <a:lstStyle/>
+          <a:p>
+            <a:pPr>
+              <a:buChar char="•"/>
+            </a:pPr>
+            <a:r>
+              <a:rPr sz="1000" b="0" i="0" baseline="0" dirty="0">
+                <a:latin typeface="Calibri"/>
+              </a:rPr>
+              <a:t>  Qualifying players per real NCAA team-season (\</a:t>
+            </a:r>
+            <a:r>
+              <a:rPr sz="1000" b="0" i="0" baseline="0" dirty="0" err="1">
+                <a:latin typeface="Calibri"/>
+              </a:rPr>
+              <a:t>geq</a:t>
+            </a:r>
+            <a:r>
+              <a:rPr sz="1000" b="0" i="0" baseline="0" dirty="0">
+                <a:latin typeface="Calibri"/>
+              </a:rPr>
+              <a:t> 20 ESPN minutes).</a:t>
+            </a:r>
+          </a:p>
+          <a:p>
+            <a:pPr>
+              <a:buChar char="•"/>
+            </a:pPr>
+            <a:r>
+              <a:rPr sz="1000" b="0" i="0" baseline="0" dirty="0">
+                <a:latin typeface="Calibri"/>
+              </a:rPr>
+              <a:t>  $n=6,492$ team-seasons · mean=9.6 · median=11 · sd=3.6.</a:t>
+            </a:r>
+          </a:p>
+          <a:p>
+            <a:pPr>
+              <a:buChar char="•"/>
+            </a:pPr>
+            <a:r>
+              <a:rPr sz="1000" b="0" i="0" baseline="0" dirty="0">
+                <a:latin typeface="Calibri"/>
+              </a:rPr>
+              <a:t>  Red dotted = NCAA mean; orange dashed = LG fixed $C=15$.</a:t>
+            </a:r>
+          </a:p>
+          <a:p>
+            <a:pPr>
+              <a:buChar char="•"/>
+            </a:pPr>
+            <a:r>
+              <a:rPr sz="1000" b="0" i="0" baseline="0" dirty="0">
+                <a:latin typeface="Calibri"/>
+              </a:rPr>
+              <a:t>  Only 2.3\% of teams have exactly 15 qualifying players.</a:t>
+            </a:r>
+          </a:p>
+          <a:p>
+            <a:pPr>
+              <a:buChar char="•"/>
+            </a:pPr>
+            <a:r>
+              <a:rPr sz="1000" b="0" i="0" baseline="0" dirty="0">
+                <a:latin typeface="Calibri"/>
+              </a:rPr>
+              <a:t>  Same ability pool ~62k; LG repacks into J=N/15 synthetic 15-man leagues.</a:t>
+            </a:r>
+          </a:p>
+          <a:p>
+            <a:pPr>
+              <a:buChar char="•"/>
+            </a:pPr>
+            <a:r>
+              <a:rPr sz="1000" b="0" i="0" baseline="0" dirty="0">
+                <a:latin typeface="Calibri"/>
+              </a:rPr>
+              <a:t>  Minutes floor shapes peer count — state explicitly in methods.</a:t>
+            </a:r>
+          </a:p>
+        </p:txBody>
+      </p:sp>
+      <p:sp>
+        <p:nvSpPr>
+          <p:cNvPr id="6" name="TextBox 5"/>
+          <p:cNvSpPr txBox="1"/>
+          <p:nvPr/>
+        </p:nvSpPr>
+        <p:spPr>
+          <a:xfrm>
+            <a:off x="384048" y="6053328"/>
+            <a:ext cx="11423599" cy="420624"/>
+          </a:xfrm>
+          <a:prstGeom prst="rect">
+            <a:avLst/>
+          </a:prstGeom>
+          <a:noFill/>
+        </p:spPr>
+        <p:txBody>
+          <a:bodyPr wrap="square">
+            <a:spAutoFit/>
+          </a:bodyPr>
+          <a:lstStyle/>
+          <a:p>
+            <a:pPr algn="l"/>
+            <a:r>
+              <a:rPr sz="1100" b="1" i="0" baseline="0">
+                <a:latin typeface="Calibri"/>
+              </a:rPr>
+              <a:t>Talking point: empirical teams are ~10 rotation players; LG uses fixed 15 — comparability is distributional, not headcount.</a:t>
+            </a:r>
+          </a:p>
+        </p:txBody>
+      </p:sp>
+    </p:spTree>
+  </p:cSld>
+  <p:clrMapOvr>
+    <a:masterClrMapping/>
+  </p:clrMapOvr>
+</p:sld>
+</file>
+
+<file path=ppt/slides/slide12.xml><?xml version="1.0" encoding="utf-8"?>
+<p:sld xmlns:a="http://schemas.openxmlformats.org/drawingml/2006/main" xmlns:r="http://schemas.openxmlformats.org/officeDocument/2006/relationships" xmlns:p="http://schemas.openxmlformats.org/presentationml/2006/main">
+  <p:cSld>
+    <p:spTree>
+      <p:nvGrpSpPr>
+        <p:cNvPr id="1" name=""/>
+        <p:cNvGrpSpPr/>
+        <p:nvPr/>
+      </p:nvGrpSpPr>
+      <p:grpSpPr>
+        <a:xfrm>
+          <a:off x="0" y="0"/>
+          <a:ext cx="0" cy="0"/>
+          <a:chOff x="0" y="0"/>
+          <a:chExt cx="0" cy="0"/>
+        </a:xfrm>
+      </p:grpSpPr>
+      <p:sp>
+        <p:nvSpPr>
+          <p:cNvPr id="2" name="TextBox 1"/>
+          <p:cNvSpPr txBox="1"/>
+          <p:nvPr/>
+        </p:nvSpPr>
+        <p:spPr>
+          <a:xfrm>
+            <a:off x="384048" y="219456"/>
+            <a:ext cx="11423599" cy="457200"/>
+          </a:xfrm>
+          <a:prstGeom prst="rect">
+            <a:avLst/>
+          </a:prstGeom>
+          <a:noFill/>
+        </p:spPr>
+        <p:txBody>
+          <a:bodyPr wrap="none">
+            <a:spAutoFit/>
+          </a:bodyPr>
+          <a:lstStyle/>
+          <a:p>
+            <a:r>
+              <a:rPr sz="2000" b="1" i="0" baseline="0">
+                <a:latin typeface="Calibri"/>
+              </a:rPr>
+              <a:t>Hero sensitivity — min\_minutes ladder</a:t>
+            </a:r>
+          </a:p>
+        </p:txBody>
+      </p:sp>
+      <p:sp>
+        <p:nvSpPr>
+          <p:cNvPr id="3" name="TextBox 2"/>
+          <p:cNvSpPr txBox="1"/>
+          <p:nvPr/>
+        </p:nvSpPr>
+        <p:spPr>
+          <a:xfrm>
+            <a:off x="384048" y="713232"/>
+            <a:ext cx="11423599" cy="246888"/>
+          </a:xfrm>
+          <a:prstGeom prst="rect">
+            <a:avLst/>
+          </a:prstGeom>
+          <a:noFill/>
+        </p:spPr>
+        <p:txBody>
+          <a:bodyPr wrap="none">
+            <a:spAutoFit/>
+          </a:bodyPr>
+          <a:lstStyle/>
+          <a:p>
+            <a:r>
+              <a:rPr sz="1000" b="0" i="0" baseline="0">
+                <a:latin typeface="Calibri"/>
+              </a:rPr>
+              <a:t>MBB 2011-2021 · poolq\_loo ventiles · 0 / 10 / 20 min</a:t>
+            </a:r>
+          </a:p>
+        </p:txBody>
+      </p:sp>
+      <p:pic>
+        <p:nvPicPr>
+          <p:cNvPr id="4" name="Picture 3" descr="HERO_min_minutes_sensitivity_compare_2011_2021.png"/>
+          <p:cNvPicPr>
+            <a:picLocks noChangeAspect="1"/>
+          </p:cNvPicPr>
+          <p:nvPr/>
+        </p:nvPicPr>
+        <p:blipFill>
+          <a:blip r:embed="rId2"/>
+          <a:stretch>
+            <a:fillRect/>
+          </a:stretch>
+        </p:blipFill>
+        <p:spPr>
+          <a:xfrm>
+            <a:off x="468988" y="1220692"/>
+            <a:ext cx="11276037" cy="3219105"/>
+          </a:xfrm>
+          <a:prstGeom prst="rect">
+            <a:avLst/>
+          </a:prstGeom>
+        </p:spPr>
+      </p:pic>
+      <p:sp>
+        <p:nvSpPr>
+          <p:cNvPr id="5" name="TextBox 4"/>
+          <p:cNvSpPr txBox="1"/>
+          <p:nvPr/>
+        </p:nvSpPr>
+        <p:spPr>
+          <a:xfrm>
+            <a:off x="1305703" y="4827530"/>
+            <a:ext cx="10697609" cy="651613"/>
+          </a:xfrm>
+          <a:prstGeom prst="rect">
+            <a:avLst/>
+          </a:prstGeom>
+          <a:noFill/>
+        </p:spPr>
+        <p:txBody>
+          <a:bodyPr wrap="square" numCol="2">
+            <a:noAutofit/>
+          </a:bodyPr>
+          <a:lstStyle/>
+          <a:p>
+            <a:pPr>
+              <a:buChar char="•"/>
+            </a:pPr>
+            <a:r>
+              <a:rPr sz="1000" b="0" i="0" baseline="0" dirty="0">
+                <a:latin typeface="Calibri"/>
+              </a:rPr>
+              <a:t>  Hero x-axis: draft rate vs poolq_loo </a:t>
+            </a:r>
+            <a:r>
+              <a:rPr sz="1000" b="0" i="0" baseline="0" dirty="0" err="1">
+                <a:latin typeface="Calibri"/>
+              </a:rPr>
+              <a:t>ventiles</a:t>
+            </a:r>
+            <a:r>
+              <a:rPr sz="1000" b="0" i="0" baseline="0" dirty="0">
+                <a:latin typeface="Calibri"/>
+              </a:rPr>
+              <a:t> · MBB 2011-2021 · 16 quantile.</a:t>
+            </a:r>
+          </a:p>
+          <a:p>
+            <a:pPr>
+              <a:buChar char="•"/>
+            </a:pPr>
+            <a:r>
+              <a:rPr sz="1000" b="0" i="0" baseline="0" dirty="0">
+                <a:latin typeface="Calibri"/>
+              </a:rPr>
+              <a:t>  min\_minutes defines who enters the panel and LOO peer pool — not neutral QC.</a:t>
+            </a:r>
+          </a:p>
+          <a:p>
+            <a:pPr>
+              <a:buChar char="•"/>
+            </a:pPr>
+            <a:r>
+              <a:rPr sz="1000" b="0" i="0" baseline="0" dirty="0">
+                <a:latin typeface="Calibri"/>
+              </a:rPr>
+              <a:t>  min=0: $n=82,893$, drafted=1,136, bin16=1.39\%, </a:t>
+            </a:r>
+            <a:r>
+              <a:rPr sz="1000" b="0" i="0" baseline="0" dirty="0" err="1">
+                <a:latin typeface="Calibri"/>
+              </a:rPr>
+              <a:t>inverted_u_like</a:t>
+            </a:r>
+            <a:r>
+              <a:rPr sz="1000" b="0" i="0" baseline="0" dirty="0">
+                <a:latin typeface="Calibri"/>
+              </a:rPr>
+              <a:t>.</a:t>
+            </a:r>
+          </a:p>
+          <a:p>
+            <a:pPr>
+              <a:buChar char="•"/>
+            </a:pPr>
+            <a:r>
+              <a:rPr sz="1000" b="0" i="0" baseline="0" dirty="0">
+                <a:latin typeface="Calibri"/>
+              </a:rPr>
+              <a:t>  min=10: $n=72,687$, drafted=1,136, bin16=1.08\%, </a:t>
+            </a:r>
+            <a:r>
+              <a:rPr sz="1000" b="0" i="0" baseline="0" dirty="0" err="1">
+                <a:latin typeface="Calibri"/>
+              </a:rPr>
+              <a:t>inverted_u_like</a:t>
+            </a:r>
+            <a:r>
+              <a:rPr sz="1000" b="0" i="0" baseline="0" dirty="0">
+                <a:latin typeface="Calibri"/>
+              </a:rPr>
+              <a:t>.</a:t>
+            </a:r>
+          </a:p>
+          <a:p>
+            <a:pPr>
+              <a:buChar char="•"/>
+            </a:pPr>
+            <a:r>
+              <a:rPr sz="1000" b="0" i="0" baseline="0" dirty="0">
+                <a:latin typeface="Calibri"/>
+              </a:rPr>
+              <a:t>  min=20: $n=62,180$, drafted=1,134, bin16=1.16\%, </a:t>
+            </a:r>
+            <a:r>
+              <a:rPr sz="1000" b="0" i="0" baseline="0" dirty="0" err="1">
+                <a:latin typeface="Calibri"/>
+              </a:rPr>
+              <a:t>inverted_u_like</a:t>
+            </a:r>
+            <a:r>
+              <a:rPr sz="1000" b="0" i="0" baseline="0" dirty="0">
+                <a:latin typeface="Calibri"/>
+              </a:rPr>
+              <a:t>.</a:t>
+            </a:r>
+          </a:p>
+          <a:p>
+            <a:pPr>
+              <a:buChar char="•"/>
+            </a:pPr>
+            <a:r>
+              <a:rPr sz="1000" b="0" i="0" baseline="0" dirty="0">
+                <a:latin typeface="Calibri"/>
+              </a:rPr>
+              <a:t>  Hero lock: min=20 — cleanest top-</a:t>
+            </a:r>
+            <a:r>
+              <a:rPr sz="1000" b="0" i="0" baseline="0" dirty="0" err="1">
+                <a:latin typeface="Calibri"/>
+              </a:rPr>
+              <a:t>ventile</a:t>
+            </a:r>
+            <a:r>
+              <a:rPr sz="1000" b="0" i="0" baseline="0" dirty="0">
+                <a:latin typeface="Calibri"/>
+              </a:rPr>
+              <a:t> cliff; min=10 robust appendix.</a:t>
+            </a:r>
+          </a:p>
+          <a:p>
+            <a:pPr>
+              <a:buChar char="•"/>
+            </a:pPr>
+            <a:r>
+              <a:rPr sz="1000" b="0" i="0" baseline="0" dirty="0">
+                <a:latin typeface="Calibri"/>
+              </a:rPr>
+              <a:t>  We are not simulating minutes in LG.</a:t>
+            </a:r>
+          </a:p>
+        </p:txBody>
+      </p:sp>
+      <p:sp>
+        <p:nvSpPr>
+          <p:cNvPr id="6" name="TextBox 5"/>
+          <p:cNvSpPr txBox="1"/>
+          <p:nvPr/>
+        </p:nvSpPr>
+        <p:spPr>
+          <a:xfrm>
+            <a:off x="384048" y="6053328"/>
+            <a:ext cx="11423599" cy="420624"/>
+          </a:xfrm>
+          <a:prstGeom prst="rect">
+            <a:avLst/>
+          </a:prstGeom>
+          <a:noFill/>
+        </p:spPr>
+        <p:txBody>
+          <a:bodyPr wrap="square">
+            <a:spAutoFit/>
+          </a:bodyPr>
+          <a:lstStyle/>
+          <a:p>
+            <a:pPr algn="l"/>
+            <a:r>
+              <a:rPr sz="1100" b="1" i="0" baseline="0">
+                <a:latin typeface="Calibri"/>
+              </a:rPr>
+              <a:t>Talking point: inverted-U survives 10- and 20-minute floors; min=20 sharpens the elite ventile dip (+2 drafted vs min=0).</a:t>
+            </a:r>
+          </a:p>
+        </p:txBody>
+      </p:sp>
+    </p:spTree>
+  </p:cSld>
+  <p:clrMapOvr>
+    <a:masterClrMapping/>
+  </p:clrMapOvr>
+</p:sld>
+</file>
+
+<file path=ppt/slides/slide13.xml><?xml version="1.0" encoding="utf-8"?>
+<p:sld xmlns:a="http://schemas.openxmlformats.org/drawingml/2006/main" xmlns:r="http://schemas.openxmlformats.org/officeDocument/2006/relationships" xmlns:p="http://schemas.openxmlformats.org/presentationml/2006/main">
+  <p:cSld>
+    <p:spTree>
+      <p:nvGrpSpPr>
+        <p:cNvPr id="1" name=""/>
+        <p:cNvGrpSpPr/>
+        <p:nvPr/>
+      </p:nvGrpSpPr>
+      <p:grpSpPr>
+        <a:xfrm>
+          <a:off x="0" y="0"/>
+          <a:ext cx="0" cy="0"/>
+          <a:chOff x="0" y="0"/>
+          <a:chExt cx="0" cy="0"/>
+        </a:xfrm>
+      </p:grpSpPr>
+      <p:sp>
+        <p:nvSpPr>
+          <p:cNvPr id="2" name="TextBox 1"/>
+          <p:cNvSpPr txBox="1"/>
+          <p:nvPr/>
+        </p:nvSpPr>
+        <p:spPr>
+          <a:xfrm>
+            <a:off x="384048" y="219456"/>
+            <a:ext cx="11423599" cy="457200"/>
+          </a:xfrm>
+          <a:prstGeom prst="rect">
+            <a:avLst/>
+          </a:prstGeom>
+          <a:noFill/>
+        </p:spPr>
+        <p:txBody>
+          <a:bodyPr wrap="none">
+            <a:spAutoFit/>
+          </a:bodyPr>
+          <a:lstStyle/>
+          <a:p>
+            <a:r>
+              <a:rPr sz="2000" b="1" i="0" baseline="0">
+                <a:latin typeface="Calibri"/>
+              </a:rPr>
+              <a:t>Hero sensitivity — min\_minutes overlay</a:t>
+            </a:r>
+          </a:p>
+        </p:txBody>
+      </p:sp>
+      <p:sp>
+        <p:nvSpPr>
+          <p:cNvPr id="3" name="TextBox 2"/>
+          <p:cNvSpPr txBox="1"/>
+          <p:nvPr/>
+        </p:nvSpPr>
+        <p:spPr>
+          <a:xfrm>
+            <a:off x="384048" y="713232"/>
+            <a:ext cx="11423599" cy="246888"/>
+          </a:xfrm>
+          <a:prstGeom prst="rect">
+            <a:avLst/>
+          </a:prstGeom>
+          <a:noFill/>
+        </p:spPr>
+        <p:txBody>
+          <a:bodyPr wrap="none">
+            <a:spAutoFit/>
+          </a:bodyPr>
+          <a:lstStyle/>
+          <a:p>
+            <a:r>
+              <a:rPr sz="1000" b="0" i="0" baseline="0">
+                <a:latin typeface="Calibri"/>
+              </a:rPr>
+              <a:t>MBB 2011-2021 · same bins, three floors</a:t>
+            </a:r>
+          </a:p>
+        </p:txBody>
+      </p:sp>
+      <p:pic>
+        <p:nvPicPr>
+          <p:cNvPr id="4" name="Picture 3" descr="HERO_min_minutes_sensitivity_overlay_2011_2021.png"/>
+          <p:cNvPicPr>
+            <a:picLocks noChangeAspect="1"/>
+          </p:cNvPicPr>
+          <p:nvPr/>
+        </p:nvPicPr>
+        <p:blipFill>
+          <a:blip r:embed="rId2"/>
+          <a:stretch>
+            <a:fillRect/>
+          </a:stretch>
+        </p:blipFill>
+        <p:spPr>
+          <a:xfrm>
+            <a:off x="2020977" y="941832"/>
+            <a:ext cx="8150047" cy="4259516"/>
+          </a:xfrm>
+          <a:prstGeom prst="rect">
+            <a:avLst/>
+          </a:prstGeom>
+        </p:spPr>
+      </p:pic>
+      <p:sp>
+        <p:nvSpPr>
+          <p:cNvPr id="5" name="TextBox 4"/>
+          <p:cNvSpPr txBox="1"/>
+          <p:nvPr/>
+        </p:nvSpPr>
+        <p:spPr>
+          <a:xfrm>
+            <a:off x="784098" y="5205075"/>
+            <a:ext cx="11134852" cy="706776"/>
+          </a:xfrm>
+          <a:prstGeom prst="rect">
+            <a:avLst/>
+          </a:prstGeom>
+          <a:noFill/>
+        </p:spPr>
+        <p:txBody>
+          <a:bodyPr wrap="square" numCol="2">
+            <a:noAutofit/>
+          </a:bodyPr>
+          <a:lstStyle/>
+          <a:p>
+            <a:pPr>
+              <a:buChar char="•"/>
+            </a:pPr>
+            <a:r>
+              <a:rPr sz="1000" b="0" i="0" baseline="0" dirty="0">
+                <a:latin typeface="Calibri"/>
+              </a:rPr>
+              <a:t>  Hero x-axis: draft rate vs poolq_loo </a:t>
+            </a:r>
+            <a:r>
+              <a:rPr sz="1000" b="0" i="0" baseline="0" dirty="0" err="1">
+                <a:latin typeface="Calibri"/>
+              </a:rPr>
+              <a:t>ventiles</a:t>
+            </a:r>
+            <a:r>
+              <a:rPr sz="1000" b="0" i="0" baseline="0" dirty="0">
+                <a:latin typeface="Calibri"/>
+              </a:rPr>
+              <a:t> · MBB 2011-2021 · 16 quantile.</a:t>
+            </a:r>
+          </a:p>
+          <a:p>
+            <a:pPr>
+              <a:buChar char="•"/>
+            </a:pPr>
+            <a:r>
+              <a:rPr sz="1000" b="0" i="0" baseline="0" dirty="0">
+                <a:latin typeface="Calibri"/>
+              </a:rPr>
+              <a:t>  min\_minutes defines who enters the panel and LOO peer pool — not neutral QC.</a:t>
+            </a:r>
+          </a:p>
+          <a:p>
+            <a:pPr>
+              <a:buChar char="•"/>
+            </a:pPr>
+            <a:r>
+              <a:rPr sz="1000" b="0" i="0" baseline="0" dirty="0">
+                <a:latin typeface="Calibri"/>
+              </a:rPr>
+              <a:t>  min=0: $n=82,893$, drafted=1,136, bin16=1.39\%, </a:t>
+            </a:r>
+            <a:r>
+              <a:rPr sz="1000" b="0" i="0" baseline="0" dirty="0" err="1">
+                <a:latin typeface="Calibri"/>
+              </a:rPr>
+              <a:t>inverted_u_like</a:t>
+            </a:r>
+            <a:r>
+              <a:rPr sz="1000" b="0" i="0" baseline="0" dirty="0">
+                <a:latin typeface="Calibri"/>
+              </a:rPr>
+              <a:t>.</a:t>
+            </a:r>
+          </a:p>
+          <a:p>
+            <a:pPr>
+              <a:buChar char="•"/>
+            </a:pPr>
+            <a:r>
+              <a:rPr sz="1000" b="0" i="0" baseline="0" dirty="0">
+                <a:latin typeface="Calibri"/>
+              </a:rPr>
+              <a:t>  min=10: $n=72,687$, drafted=1,136, bin16=1.08\%, </a:t>
+            </a:r>
+            <a:r>
+              <a:rPr sz="1000" b="0" i="0" baseline="0" dirty="0" err="1">
+                <a:latin typeface="Calibri"/>
+              </a:rPr>
+              <a:t>inverted_u_like</a:t>
+            </a:r>
+            <a:r>
+              <a:rPr sz="1000" b="0" i="0" baseline="0" dirty="0">
+                <a:latin typeface="Calibri"/>
+              </a:rPr>
+              <a:t>.</a:t>
+            </a:r>
+          </a:p>
+          <a:p>
+            <a:pPr>
+              <a:buChar char="•"/>
+            </a:pPr>
+            <a:r>
+              <a:rPr sz="1000" b="0" i="0" baseline="0" dirty="0">
+                <a:latin typeface="Calibri"/>
+              </a:rPr>
+              <a:t>  min=20: $n=62,180$, drafted=1,134, bin16=1.16\%, </a:t>
+            </a:r>
+            <a:r>
+              <a:rPr sz="1000" b="0" i="0" baseline="0" dirty="0" err="1">
+                <a:latin typeface="Calibri"/>
+              </a:rPr>
+              <a:t>inverted_u_like</a:t>
+            </a:r>
+            <a:r>
+              <a:rPr sz="1000" b="0" i="0" baseline="0" dirty="0">
+                <a:latin typeface="Calibri"/>
+              </a:rPr>
+              <a:t>.</a:t>
+            </a:r>
+          </a:p>
+          <a:p>
+            <a:pPr>
+              <a:buChar char="•"/>
+            </a:pPr>
+            <a:r>
+              <a:rPr sz="1000" b="0" i="0" baseline="0" dirty="0">
+                <a:latin typeface="Calibri"/>
+              </a:rPr>
+              <a:t>  Overlay: same </a:t>
+            </a:r>
+            <a:r>
+              <a:rPr sz="1000" b="0" i="0" baseline="0" dirty="0" err="1">
+                <a:latin typeface="Calibri"/>
+              </a:rPr>
+              <a:t>estimand</a:t>
+            </a:r>
+            <a:r>
+              <a:rPr sz="1000" b="0" i="0" baseline="0" dirty="0">
+                <a:latin typeface="Calibri"/>
+              </a:rPr>
+              <a:t>, different playing-time floors.</a:t>
+            </a:r>
+          </a:p>
+          <a:p>
+            <a:pPr>
+              <a:buChar char="•"/>
+            </a:pPr>
+            <a:r>
+              <a:rPr sz="1000" b="0" i="0" baseline="0" dirty="0">
+                <a:latin typeface="Calibri"/>
+              </a:rPr>
+              <a:t>  We are not simulating minutes in LG.</a:t>
+            </a:r>
+          </a:p>
+        </p:txBody>
+      </p:sp>
+      <p:sp>
+        <p:nvSpPr>
+          <p:cNvPr id="6" name="TextBox 5"/>
+          <p:cNvSpPr txBox="1"/>
+          <p:nvPr/>
+        </p:nvSpPr>
+        <p:spPr>
+          <a:xfrm>
+            <a:off x="384048" y="6053328"/>
+            <a:ext cx="11423599" cy="420624"/>
+          </a:xfrm>
+          <a:prstGeom prst="rect">
+            <a:avLst/>
+          </a:prstGeom>
+          <a:noFill/>
+        </p:spPr>
+        <p:txBody>
+          <a:bodyPr wrap="square">
+            <a:spAutoFit/>
+          </a:bodyPr>
+          <a:lstStyle/>
+          <a:p>
+            <a:pPr algn="l"/>
+            <a:r>
+              <a:rPr sz="1100" b="1" i="0" baseline="0">
+                <a:latin typeface="Calibri"/>
+              </a:rPr>
+              <a:t>Talking point: pattern is not an artifact of one arbitrary cutoff.</a:t>
+            </a:r>
+          </a:p>
+        </p:txBody>
+      </p:sp>
+    </p:spTree>
+  </p:cSld>
+  <p:clrMapOvr>
+    <a:masterClrMapping/>
+  </p:clrMapOvr>
+</p:sld>
+</file>
+
+<file path=ppt/slides/slide14.xml><?xml version="1.0" encoding="utf-8"?>
+<p:sld xmlns:a="http://schemas.openxmlformats.org/drawingml/2006/main" xmlns:r="http://schemas.openxmlformats.org/officeDocument/2006/relationships" xmlns:p="http://schemas.openxmlformats.org/presentationml/2006/main">
+  <p:cSld>
+    <p:spTree>
+      <p:nvGrpSpPr>
+        <p:cNvPr id="1" name=""/>
+        <p:cNvGrpSpPr/>
+        <p:nvPr/>
+      </p:nvGrpSpPr>
+      <p:grpSpPr>
+        <a:xfrm>
+          <a:off x="0" y="0"/>
+          <a:ext cx="0" cy="0"/>
+          <a:chOff x="0" y="0"/>
+          <a:chExt cx="0" cy="0"/>
+        </a:xfrm>
+      </p:grpSpPr>
       <mc:AlternateContent xmlns:mc="http://schemas.openxmlformats.org/markup-compatibility/2006" xmlns:a14="http://schemas.microsoft.com/office/drawing/2010/main">
         <mc:Choice Requires="a14">
           <p:sp>
@@ -9160,7 +10013,7 @@
 </p:sld>
 </file>
 
-<file path=ppt/slides/slide12.xml><?xml version="1.0" encoding="utf-8"?>
+<file path=ppt/slides/slide15.xml><?xml version="1.0" encoding="utf-8"?>
 <p:sld xmlns:a="http://schemas.openxmlformats.org/drawingml/2006/main" xmlns:r="http://schemas.openxmlformats.org/officeDocument/2006/relationships" xmlns:p="http://schemas.openxmlformats.org/presentationml/2006/main">
   <p:cSld>
     <p:spTree>
@@ -10331,7 +11184,7 @@
 </p:sld>
 </file>
 
-<file path=ppt/slides/slide13.xml><?xml version="1.0" encoding="utf-8"?>
+<file path=ppt/slides/slide16.xml><?xml version="1.0" encoding="utf-8"?>
 <p:sld xmlns:a="http://schemas.openxmlformats.org/drawingml/2006/main" xmlns:r="http://schemas.openxmlformats.org/officeDocument/2006/relationships" xmlns:p="http://schemas.openxmlformats.org/presentationml/2006/main">
   <p:cSld>
     <p:spTree>
